--- a/02_案例分析/工业遗产改造案例分析_两案对比.pptx
+++ b/02_案例分析/工业遗产改造案例分析_两案对比.pptx
@@ -14,6 +14,8 @@
     <p:sldId id="262" r:id="rId13"/>
     <p:sldId id="263" r:id="rId14"/>
     <p:sldId id="264" r:id="rId15"/>
+    <p:sldId id="265" r:id="rId16"/>
+    <p:sldId id="266" r:id="rId17"/>
   </p:sldIdLst>
   <p:sldSz cx="12191695" cy="6858000" type="screen4x3"/>
   <p:notesSz cx="6858000" cy="9144000"/>
@@ -3640,6 +3642,2638 @@
             </a:pPr>
             <a:r>
               <a:t>案例资料来源：谷德设计、东南大学建筑学院及相关项目公开资料</a:t>
+            </a:r>
+          </a:p>
+        </p:txBody>
+      </p:sp>
+    </p:spTree>
+  </p:cSld>
+  <p:clrMapOvr>
+    <a:masterClrMapping/>
+  </p:clrMapOvr>
+</p:sld>
+</file>
+
+<file path=ppt/slides/slide10.xml><?xml version="1.0" encoding="utf-8"?>
+<p:sld xmlns:a="http://schemas.openxmlformats.org/drawingml/2006/main" xmlns:p="http://schemas.openxmlformats.org/presentationml/2006/main" xmlns:r="http://schemas.openxmlformats.org/officeDocument/2006/relationships">
+  <p:cSld>
+    <p:bg>
+      <p:bgPr>
+        <a:solidFill>
+          <a:srgbClr val="F7F5EF"/>
+        </a:solidFill>
+        <a:effectLst/>
+      </p:bgPr>
+    </p:bg>
+    <p:spTree>
+      <p:nvGrpSpPr>
+        <p:cNvPr id="1" name=""/>
+        <p:cNvGrpSpPr/>
+        <p:nvPr/>
+      </p:nvGrpSpPr>
+      <p:grpSpPr/>
+      <p:sp>
+        <p:nvSpPr>
+          <p:cNvPr id="2" name="Rounded Rectangle 1"/>
+          <p:cNvSpPr/>
+          <p:nvPr/>
+        </p:nvSpPr>
+        <p:spPr>
+          <a:xfrm>
+            <a:off x="0" y="0"/>
+            <a:ext cx="12191695" cy="502920"/>
+          </a:xfrm>
+          <a:prstGeom prst="roundRect">
+            <a:avLst/>
+          </a:prstGeom>
+          <a:solidFill>
+            <a:srgbClr val="193C35"/>
+          </a:solidFill>
+          <a:ln w="12700">
+            <a:solidFill>
+              <a:srgbClr val="193C35"/>
+            </a:solidFill>
+          </a:ln>
+        </p:spPr>
+        <p:style>
+          <a:lnRef idx="1">
+            <a:schemeClr val="accent1"/>
+          </a:lnRef>
+          <a:fillRef idx="3">
+            <a:schemeClr val="accent1"/>
+          </a:fillRef>
+          <a:effectRef idx="2">
+            <a:schemeClr val="accent1"/>
+          </a:effectRef>
+          <a:fontRef idx="minor">
+            <a:schemeClr val="lt1"/>
+          </a:fontRef>
+        </p:style>
+        <p:txBody>
+          <a:bodyPr rtlCol="0" anchor="ctr"/>
+          <a:lstStyle/>
+          <a:p>
+            <a:pPr algn="ctr"/>
+          </a:p>
+        </p:txBody>
+      </p:sp>
+      <p:sp>
+        <p:nvSpPr>
+          <p:cNvPr id="3" name="TextBox 2"/>
+          <p:cNvSpPr txBox="1"/>
+          <p:nvPr/>
+        </p:nvSpPr>
+        <p:spPr>
+          <a:xfrm>
+            <a:off x="411480" y="100584"/>
+            <a:ext cx="457200" cy="228600"/>
+          </a:xfrm>
+          <a:prstGeom prst="rect">
+            <a:avLst/>
+          </a:prstGeom>
+          <a:noFill/>
+        </p:spPr>
+        <p:txBody>
+          <a:bodyPr wrap="square" lIns="63500" rIns="63500" tIns="50800">
+            <a:spAutoFit/>
+          </a:bodyPr>
+          <a:lstStyle/>
+          <a:p>
+            <a:pPr algn="l">
+              <a:defRPr sz="1600" b="1">
+                <a:solidFill>
+                  <a:srgbClr val="D9EADF"/>
+                </a:solidFill>
+                <a:latin typeface="Noto Sans CJK SC"/>
+              </a:defRPr>
+            </a:pPr>
+            <a:r>
+              <a:t>07</a:t>
+            </a:r>
+          </a:p>
+        </p:txBody>
+      </p:sp>
+      <p:sp>
+        <p:nvSpPr>
+          <p:cNvPr id="4" name="TextBox 3"/>
+          <p:cNvSpPr txBox="1"/>
+          <p:nvPr/>
+        </p:nvSpPr>
+        <p:spPr>
+          <a:xfrm>
+            <a:off x="960120" y="73152"/>
+            <a:ext cx="8229600" cy="274320"/>
+          </a:xfrm>
+          <a:prstGeom prst="rect">
+            <a:avLst/>
+          </a:prstGeom>
+          <a:noFill/>
+        </p:spPr>
+        <p:txBody>
+          <a:bodyPr wrap="square" lIns="63500" rIns="63500" tIns="50800">
+            <a:spAutoFit/>
+          </a:bodyPr>
+          <a:lstStyle/>
+          <a:p>
+            <a:pPr algn="l">
+              <a:defRPr sz="2400" b="1">
+                <a:solidFill>
+                  <a:srgbClr val="193C35"/>
+                </a:solidFill>
+                <a:latin typeface="Noto Sans CJK SC"/>
+              </a:defRPr>
+            </a:pPr>
+            <a:r>
+              <a:t>案例一独立分析：实地照片与空间阅读</a:t>
+            </a:r>
+          </a:p>
+        </p:txBody>
+      </p:sp>
+      <p:sp>
+        <p:nvSpPr>
+          <p:cNvPr id="5" name="TextBox 4"/>
+          <p:cNvSpPr txBox="1"/>
+          <p:nvPr/>
+        </p:nvSpPr>
+        <p:spPr>
+          <a:xfrm>
+            <a:off x="8869680" y="118872"/>
+            <a:ext cx="2743200" cy="182880"/>
+          </a:xfrm>
+          <a:prstGeom prst="rect">
+            <a:avLst/>
+          </a:prstGeom>
+          <a:noFill/>
+        </p:spPr>
+        <p:txBody>
+          <a:bodyPr wrap="square" lIns="63500" rIns="63500" tIns="50800">
+            <a:spAutoFit/>
+          </a:bodyPr>
+          <a:lstStyle/>
+          <a:p>
+            <a:pPr algn="r">
+              <a:defRPr sz="1000" b="0">
+                <a:solidFill>
+                  <a:srgbClr val="65746D"/>
+                </a:solidFill>
+                <a:latin typeface="Noto Sans CJK SC"/>
+              </a:defRPr>
+            </a:pPr>
+            <a:r>
+              <a:t>TONSLEY · PHOTO INDEX</a:t>
+            </a:r>
+          </a:p>
+        </p:txBody>
+      </p:sp>
+      <p:sp>
+        <p:nvSpPr>
+          <p:cNvPr id="6" name="Rounded Rectangle 5"/>
+          <p:cNvSpPr/>
+          <p:nvPr/>
+        </p:nvSpPr>
+        <p:spPr>
+          <a:xfrm>
+            <a:off x="685800" y="914400"/>
+            <a:ext cx="5212080" cy="3474720"/>
+          </a:xfrm>
+          <a:prstGeom prst="roundRect">
+            <a:avLst/>
+          </a:prstGeom>
+          <a:solidFill>
+            <a:srgbClr val="193C35"/>
+          </a:solidFill>
+          <a:ln w="12700">
+            <a:solidFill>
+              <a:srgbClr val="193C35"/>
+            </a:solidFill>
+          </a:ln>
+        </p:spPr>
+        <p:style>
+          <a:lnRef idx="1">
+            <a:schemeClr val="accent1"/>
+          </a:lnRef>
+          <a:fillRef idx="3">
+            <a:schemeClr val="accent1"/>
+          </a:fillRef>
+          <a:effectRef idx="2">
+            <a:schemeClr val="accent1"/>
+          </a:effectRef>
+          <a:fontRef idx="minor">
+            <a:schemeClr val="lt1"/>
+          </a:fontRef>
+        </p:style>
+        <p:txBody>
+          <a:bodyPr rtlCol="0" anchor="ctr"/>
+          <a:lstStyle/>
+          <a:p>
+            <a:pPr algn="ctr"/>
+          </a:p>
+        </p:txBody>
+      </p:sp>
+      <p:sp>
+        <p:nvSpPr>
+          <p:cNvPr id="7" name="Rectangle 6"/>
+          <p:cNvSpPr/>
+          <p:nvPr/>
+        </p:nvSpPr>
+        <p:spPr>
+          <a:xfrm>
+            <a:off x="822960" y="1051560"/>
+            <a:ext cx="54864" cy="3200400"/>
+          </a:xfrm>
+          <a:prstGeom prst="rect">
+            <a:avLst/>
+          </a:prstGeom>
+          <a:solidFill>
+            <a:srgbClr val="EFC78D"/>
+          </a:solidFill>
+          <a:ln>
+            <a:noFill/>
+          </a:ln>
+        </p:spPr>
+        <p:style>
+          <a:lnRef idx="1">
+            <a:schemeClr val="accent1"/>
+          </a:lnRef>
+          <a:fillRef idx="3">
+            <a:schemeClr val="accent1"/>
+          </a:fillRef>
+          <a:effectRef idx="2">
+            <a:schemeClr val="accent1"/>
+          </a:effectRef>
+          <a:fontRef idx="minor">
+            <a:schemeClr val="lt1"/>
+          </a:fontRef>
+        </p:style>
+        <p:txBody>
+          <a:bodyPr rtlCol="0" anchor="ctr"/>
+          <a:lstStyle/>
+          <a:p>
+            <a:pPr algn="ctr"/>
+          </a:p>
+        </p:txBody>
+      </p:sp>
+      <p:sp>
+        <p:nvSpPr>
+          <p:cNvPr id="8" name="Rectangle 7"/>
+          <p:cNvSpPr/>
+          <p:nvPr/>
+        </p:nvSpPr>
+        <p:spPr>
+          <a:xfrm>
+            <a:off x="1448409" y="1051560"/>
+            <a:ext cx="54864" cy="3200400"/>
+          </a:xfrm>
+          <a:prstGeom prst="rect">
+            <a:avLst/>
+          </a:prstGeom>
+          <a:solidFill>
+            <a:srgbClr val="EFC78D"/>
+          </a:solidFill>
+          <a:ln>
+            <a:noFill/>
+          </a:ln>
+        </p:spPr>
+        <p:style>
+          <a:lnRef idx="1">
+            <a:schemeClr val="accent1"/>
+          </a:lnRef>
+          <a:fillRef idx="3">
+            <a:schemeClr val="accent1"/>
+          </a:fillRef>
+          <a:effectRef idx="2">
+            <a:schemeClr val="accent1"/>
+          </a:effectRef>
+          <a:fontRef idx="minor">
+            <a:schemeClr val="lt1"/>
+          </a:fontRef>
+        </p:style>
+        <p:txBody>
+          <a:bodyPr rtlCol="0" anchor="ctr"/>
+          <a:lstStyle/>
+          <a:p>
+            <a:pPr algn="ctr"/>
+          </a:p>
+        </p:txBody>
+      </p:sp>
+      <p:sp>
+        <p:nvSpPr>
+          <p:cNvPr id="9" name="Rectangle 8"/>
+          <p:cNvSpPr/>
+          <p:nvPr/>
+        </p:nvSpPr>
+        <p:spPr>
+          <a:xfrm>
+            <a:off x="2073859" y="1051560"/>
+            <a:ext cx="54864" cy="3200400"/>
+          </a:xfrm>
+          <a:prstGeom prst="rect">
+            <a:avLst/>
+          </a:prstGeom>
+          <a:solidFill>
+            <a:srgbClr val="EFC78D"/>
+          </a:solidFill>
+          <a:ln>
+            <a:noFill/>
+          </a:ln>
+        </p:spPr>
+        <p:style>
+          <a:lnRef idx="1">
+            <a:schemeClr val="accent1"/>
+          </a:lnRef>
+          <a:fillRef idx="3">
+            <a:schemeClr val="accent1"/>
+          </a:fillRef>
+          <a:effectRef idx="2">
+            <a:schemeClr val="accent1"/>
+          </a:effectRef>
+          <a:fontRef idx="minor">
+            <a:schemeClr val="lt1"/>
+          </a:fontRef>
+        </p:style>
+        <p:txBody>
+          <a:bodyPr rtlCol="0" anchor="ctr"/>
+          <a:lstStyle/>
+          <a:p>
+            <a:pPr algn="ctr"/>
+          </a:p>
+        </p:txBody>
+      </p:sp>
+      <p:sp>
+        <p:nvSpPr>
+          <p:cNvPr id="10" name="Rectangle 9"/>
+          <p:cNvSpPr/>
+          <p:nvPr/>
+        </p:nvSpPr>
+        <p:spPr>
+          <a:xfrm>
+            <a:off x="2699308" y="1051560"/>
+            <a:ext cx="54864" cy="3200400"/>
+          </a:xfrm>
+          <a:prstGeom prst="rect">
+            <a:avLst/>
+          </a:prstGeom>
+          <a:solidFill>
+            <a:srgbClr val="EFC78D"/>
+          </a:solidFill>
+          <a:ln>
+            <a:noFill/>
+          </a:ln>
+        </p:spPr>
+        <p:style>
+          <a:lnRef idx="1">
+            <a:schemeClr val="accent1"/>
+          </a:lnRef>
+          <a:fillRef idx="3">
+            <a:schemeClr val="accent1"/>
+          </a:fillRef>
+          <a:effectRef idx="2">
+            <a:schemeClr val="accent1"/>
+          </a:effectRef>
+          <a:fontRef idx="minor">
+            <a:schemeClr val="lt1"/>
+          </a:fontRef>
+        </p:style>
+        <p:txBody>
+          <a:bodyPr rtlCol="0" anchor="ctr"/>
+          <a:lstStyle/>
+          <a:p>
+            <a:pPr algn="ctr"/>
+          </a:p>
+        </p:txBody>
+      </p:sp>
+      <p:sp>
+        <p:nvSpPr>
+          <p:cNvPr id="11" name="Rectangle 10"/>
+          <p:cNvSpPr/>
+          <p:nvPr/>
+        </p:nvSpPr>
+        <p:spPr>
+          <a:xfrm>
+            <a:off x="3324758" y="1051560"/>
+            <a:ext cx="54864" cy="3200400"/>
+          </a:xfrm>
+          <a:prstGeom prst="rect">
+            <a:avLst/>
+          </a:prstGeom>
+          <a:solidFill>
+            <a:srgbClr val="EFC78D"/>
+          </a:solidFill>
+          <a:ln>
+            <a:noFill/>
+          </a:ln>
+        </p:spPr>
+        <p:style>
+          <a:lnRef idx="1">
+            <a:schemeClr val="accent1"/>
+          </a:lnRef>
+          <a:fillRef idx="3">
+            <a:schemeClr val="accent1"/>
+          </a:fillRef>
+          <a:effectRef idx="2">
+            <a:schemeClr val="accent1"/>
+          </a:effectRef>
+          <a:fontRef idx="minor">
+            <a:schemeClr val="lt1"/>
+          </a:fontRef>
+        </p:style>
+        <p:txBody>
+          <a:bodyPr rtlCol="0" anchor="ctr"/>
+          <a:lstStyle/>
+          <a:p>
+            <a:pPr algn="ctr"/>
+          </a:p>
+        </p:txBody>
+      </p:sp>
+      <p:sp>
+        <p:nvSpPr>
+          <p:cNvPr id="12" name="Rectangle 11"/>
+          <p:cNvSpPr/>
+          <p:nvPr/>
+        </p:nvSpPr>
+        <p:spPr>
+          <a:xfrm>
+            <a:off x="3950208" y="1051560"/>
+            <a:ext cx="54864" cy="3200400"/>
+          </a:xfrm>
+          <a:prstGeom prst="rect">
+            <a:avLst/>
+          </a:prstGeom>
+          <a:solidFill>
+            <a:srgbClr val="EFC78D"/>
+          </a:solidFill>
+          <a:ln>
+            <a:noFill/>
+          </a:ln>
+        </p:spPr>
+        <p:style>
+          <a:lnRef idx="1">
+            <a:schemeClr val="accent1"/>
+          </a:lnRef>
+          <a:fillRef idx="3">
+            <a:schemeClr val="accent1"/>
+          </a:fillRef>
+          <a:effectRef idx="2">
+            <a:schemeClr val="accent1"/>
+          </a:effectRef>
+          <a:fontRef idx="minor">
+            <a:schemeClr val="lt1"/>
+          </a:fontRef>
+        </p:style>
+        <p:txBody>
+          <a:bodyPr rtlCol="0" anchor="ctr"/>
+          <a:lstStyle/>
+          <a:p>
+            <a:pPr algn="ctr"/>
+          </a:p>
+        </p:txBody>
+      </p:sp>
+      <p:sp>
+        <p:nvSpPr>
+          <p:cNvPr id="13" name="Rectangle 12"/>
+          <p:cNvSpPr/>
+          <p:nvPr/>
+        </p:nvSpPr>
+        <p:spPr>
+          <a:xfrm>
+            <a:off x="4575657" y="1051560"/>
+            <a:ext cx="54864" cy="3200400"/>
+          </a:xfrm>
+          <a:prstGeom prst="rect">
+            <a:avLst/>
+          </a:prstGeom>
+          <a:solidFill>
+            <a:srgbClr val="EFC78D"/>
+          </a:solidFill>
+          <a:ln>
+            <a:noFill/>
+          </a:ln>
+        </p:spPr>
+        <p:style>
+          <a:lnRef idx="1">
+            <a:schemeClr val="accent1"/>
+          </a:lnRef>
+          <a:fillRef idx="3">
+            <a:schemeClr val="accent1"/>
+          </a:fillRef>
+          <a:effectRef idx="2">
+            <a:schemeClr val="accent1"/>
+          </a:effectRef>
+          <a:fontRef idx="minor">
+            <a:schemeClr val="lt1"/>
+          </a:fontRef>
+        </p:style>
+        <p:txBody>
+          <a:bodyPr rtlCol="0" anchor="ctr"/>
+          <a:lstStyle/>
+          <a:p>
+            <a:pPr algn="ctr"/>
+          </a:p>
+        </p:txBody>
+      </p:sp>
+      <p:sp>
+        <p:nvSpPr>
+          <p:cNvPr id="14" name="Rounded Rectangle 13"/>
+          <p:cNvSpPr/>
+          <p:nvPr/>
+        </p:nvSpPr>
+        <p:spPr>
+          <a:xfrm>
+            <a:off x="914400" y="3103473"/>
+            <a:ext cx="4754880" cy="625449"/>
+          </a:xfrm>
+          <a:prstGeom prst="roundRect">
+            <a:avLst/>
+          </a:prstGeom>
+          <a:solidFill>
+            <a:srgbClr val="456C5B"/>
+          </a:solidFill>
+          <a:ln w="12700">
+            <a:solidFill>
+              <a:srgbClr val="456C5B"/>
+            </a:solidFill>
+          </a:ln>
+        </p:spPr>
+        <p:style>
+          <a:lnRef idx="1">
+            <a:schemeClr val="accent1"/>
+          </a:lnRef>
+          <a:fillRef idx="3">
+            <a:schemeClr val="accent1"/>
+          </a:fillRef>
+          <a:effectRef idx="2">
+            <a:schemeClr val="accent1"/>
+          </a:effectRef>
+          <a:fontRef idx="minor">
+            <a:schemeClr val="lt1"/>
+          </a:fontRef>
+        </p:style>
+        <p:txBody>
+          <a:bodyPr rtlCol="0" anchor="ctr"/>
+          <a:lstStyle/>
+          <a:p>
+            <a:pPr algn="ctr"/>
+          </a:p>
+        </p:txBody>
+      </p:sp>
+      <p:sp>
+        <p:nvSpPr>
+          <p:cNvPr id="15" name="Rounded Rectangle 14"/>
+          <p:cNvSpPr/>
+          <p:nvPr/>
+        </p:nvSpPr>
+        <p:spPr>
+          <a:xfrm>
+            <a:off x="1623974" y="2478024"/>
+            <a:ext cx="3335731" cy="382219"/>
+          </a:xfrm>
+          <a:prstGeom prst="roundRect">
+            <a:avLst/>
+          </a:prstGeom>
+          <a:solidFill>
+            <a:srgbClr val="BCA6E6"/>
+          </a:solidFill>
+          <a:ln w="12700">
+            <a:solidFill>
+              <a:srgbClr val="BCA6E6"/>
+            </a:solidFill>
+          </a:ln>
+        </p:spPr>
+        <p:style>
+          <a:lnRef idx="1">
+            <a:schemeClr val="accent1"/>
+          </a:lnRef>
+          <a:fillRef idx="3">
+            <a:schemeClr val="accent1"/>
+          </a:fillRef>
+          <a:effectRef idx="2">
+            <a:schemeClr val="accent1"/>
+          </a:effectRef>
+          <a:fontRef idx="minor">
+            <a:schemeClr val="lt1"/>
+          </a:fontRef>
+        </p:style>
+        <p:txBody>
+          <a:bodyPr rtlCol="0" anchor="ctr"/>
+          <a:lstStyle/>
+          <a:p>
+            <a:pPr algn="ctr"/>
+          </a:p>
+        </p:txBody>
+      </p:sp>
+      <p:sp>
+        <p:nvSpPr>
+          <p:cNvPr id="16" name="TextBox 15"/>
+          <p:cNvSpPr txBox="1"/>
+          <p:nvPr/>
+        </p:nvSpPr>
+        <p:spPr>
+          <a:xfrm>
+            <a:off x="868680" y="3763670"/>
+            <a:ext cx="4846320" cy="228600"/>
+          </a:xfrm>
+          <a:prstGeom prst="rect">
+            <a:avLst/>
+          </a:prstGeom>
+          <a:noFill/>
+        </p:spPr>
+        <p:txBody>
+          <a:bodyPr wrap="square" lIns="63500" rIns="63500" tIns="50800">
+            <a:spAutoFit/>
+          </a:bodyPr>
+          <a:lstStyle/>
+          <a:p>
+            <a:pPr algn="ctr">
+              <a:defRPr sz="1200" b="1">
+                <a:solidFill>
+                  <a:srgbClr val="FFFFFF"/>
+                </a:solidFill>
+                <a:latin typeface="Noto Sans CJK SC"/>
+              </a:defRPr>
+            </a:pPr>
+            <a:r>
+              <a:t>公开实景照片索引：工业伞盖与公共绿化</a:t>
+            </a:r>
+          </a:p>
+        </p:txBody>
+      </p:sp>
+      <p:sp>
+        <p:nvSpPr>
+          <p:cNvPr id="17" name="Rounded Rectangle 16"/>
+          <p:cNvSpPr/>
+          <p:nvPr/>
+        </p:nvSpPr>
+        <p:spPr>
+          <a:xfrm>
+            <a:off x="6309360" y="914400"/>
+            <a:ext cx="5212080" cy="3474720"/>
+          </a:xfrm>
+          <a:prstGeom prst="roundRect">
+            <a:avLst/>
+          </a:prstGeom>
+          <a:solidFill>
+            <a:srgbClr val="193C35"/>
+          </a:solidFill>
+          <a:ln w="12700">
+            <a:solidFill>
+              <a:srgbClr val="193C35"/>
+            </a:solidFill>
+          </a:ln>
+        </p:spPr>
+        <p:style>
+          <a:lnRef idx="1">
+            <a:schemeClr val="accent1"/>
+          </a:lnRef>
+          <a:fillRef idx="3">
+            <a:schemeClr val="accent1"/>
+          </a:fillRef>
+          <a:effectRef idx="2">
+            <a:schemeClr val="accent1"/>
+          </a:effectRef>
+          <a:fontRef idx="minor">
+            <a:schemeClr val="lt1"/>
+          </a:fontRef>
+        </p:style>
+        <p:txBody>
+          <a:bodyPr rtlCol="0" anchor="ctr"/>
+          <a:lstStyle/>
+          <a:p>
+            <a:pPr algn="ctr"/>
+          </a:p>
+        </p:txBody>
+      </p:sp>
+      <p:sp>
+        <p:nvSpPr>
+          <p:cNvPr id="18" name="Rectangle 17"/>
+          <p:cNvSpPr/>
+          <p:nvPr/>
+        </p:nvSpPr>
+        <p:spPr>
+          <a:xfrm>
+            <a:off x="6446520" y="1051560"/>
+            <a:ext cx="54864" cy="3200400"/>
+          </a:xfrm>
+          <a:prstGeom prst="rect">
+            <a:avLst/>
+          </a:prstGeom>
+          <a:solidFill>
+            <a:srgbClr val="EFC78D"/>
+          </a:solidFill>
+          <a:ln>
+            <a:noFill/>
+          </a:ln>
+        </p:spPr>
+        <p:style>
+          <a:lnRef idx="1">
+            <a:schemeClr val="accent1"/>
+          </a:lnRef>
+          <a:fillRef idx="3">
+            <a:schemeClr val="accent1"/>
+          </a:fillRef>
+          <a:effectRef idx="2">
+            <a:schemeClr val="accent1"/>
+          </a:effectRef>
+          <a:fontRef idx="minor">
+            <a:schemeClr val="lt1"/>
+          </a:fontRef>
+        </p:style>
+        <p:txBody>
+          <a:bodyPr rtlCol="0" anchor="ctr"/>
+          <a:lstStyle/>
+          <a:p>
+            <a:pPr algn="ctr"/>
+          </a:p>
+        </p:txBody>
+      </p:sp>
+      <p:sp>
+        <p:nvSpPr>
+          <p:cNvPr id="19" name="Rectangle 18"/>
+          <p:cNvSpPr/>
+          <p:nvPr/>
+        </p:nvSpPr>
+        <p:spPr>
+          <a:xfrm>
+            <a:off x="7071969" y="1051560"/>
+            <a:ext cx="54864" cy="3200400"/>
+          </a:xfrm>
+          <a:prstGeom prst="rect">
+            <a:avLst/>
+          </a:prstGeom>
+          <a:solidFill>
+            <a:srgbClr val="EFC78D"/>
+          </a:solidFill>
+          <a:ln>
+            <a:noFill/>
+          </a:ln>
+        </p:spPr>
+        <p:style>
+          <a:lnRef idx="1">
+            <a:schemeClr val="accent1"/>
+          </a:lnRef>
+          <a:fillRef idx="3">
+            <a:schemeClr val="accent1"/>
+          </a:fillRef>
+          <a:effectRef idx="2">
+            <a:schemeClr val="accent1"/>
+          </a:effectRef>
+          <a:fontRef idx="minor">
+            <a:schemeClr val="lt1"/>
+          </a:fontRef>
+        </p:style>
+        <p:txBody>
+          <a:bodyPr rtlCol="0" anchor="ctr"/>
+          <a:lstStyle/>
+          <a:p>
+            <a:pPr algn="ctr"/>
+          </a:p>
+        </p:txBody>
+      </p:sp>
+      <p:sp>
+        <p:nvSpPr>
+          <p:cNvPr id="20" name="Rectangle 19"/>
+          <p:cNvSpPr/>
+          <p:nvPr/>
+        </p:nvSpPr>
+        <p:spPr>
+          <a:xfrm>
+            <a:off x="7697419" y="1051560"/>
+            <a:ext cx="54864" cy="3200400"/>
+          </a:xfrm>
+          <a:prstGeom prst="rect">
+            <a:avLst/>
+          </a:prstGeom>
+          <a:solidFill>
+            <a:srgbClr val="EFC78D"/>
+          </a:solidFill>
+          <a:ln>
+            <a:noFill/>
+          </a:ln>
+        </p:spPr>
+        <p:style>
+          <a:lnRef idx="1">
+            <a:schemeClr val="accent1"/>
+          </a:lnRef>
+          <a:fillRef idx="3">
+            <a:schemeClr val="accent1"/>
+          </a:fillRef>
+          <a:effectRef idx="2">
+            <a:schemeClr val="accent1"/>
+          </a:effectRef>
+          <a:fontRef idx="minor">
+            <a:schemeClr val="lt1"/>
+          </a:fontRef>
+        </p:style>
+        <p:txBody>
+          <a:bodyPr rtlCol="0" anchor="ctr"/>
+          <a:lstStyle/>
+          <a:p>
+            <a:pPr algn="ctr"/>
+          </a:p>
+        </p:txBody>
+      </p:sp>
+      <p:sp>
+        <p:nvSpPr>
+          <p:cNvPr id="21" name="Rectangle 20"/>
+          <p:cNvSpPr/>
+          <p:nvPr/>
+        </p:nvSpPr>
+        <p:spPr>
+          <a:xfrm>
+            <a:off x="8322868" y="1051560"/>
+            <a:ext cx="54864" cy="3200400"/>
+          </a:xfrm>
+          <a:prstGeom prst="rect">
+            <a:avLst/>
+          </a:prstGeom>
+          <a:solidFill>
+            <a:srgbClr val="EFC78D"/>
+          </a:solidFill>
+          <a:ln>
+            <a:noFill/>
+          </a:ln>
+        </p:spPr>
+        <p:style>
+          <a:lnRef idx="1">
+            <a:schemeClr val="accent1"/>
+          </a:lnRef>
+          <a:fillRef idx="3">
+            <a:schemeClr val="accent1"/>
+          </a:fillRef>
+          <a:effectRef idx="2">
+            <a:schemeClr val="accent1"/>
+          </a:effectRef>
+          <a:fontRef idx="minor">
+            <a:schemeClr val="lt1"/>
+          </a:fontRef>
+        </p:style>
+        <p:txBody>
+          <a:bodyPr rtlCol="0" anchor="ctr"/>
+          <a:lstStyle/>
+          <a:p>
+            <a:pPr algn="ctr"/>
+          </a:p>
+        </p:txBody>
+      </p:sp>
+      <p:sp>
+        <p:nvSpPr>
+          <p:cNvPr id="22" name="Rectangle 21"/>
+          <p:cNvSpPr/>
+          <p:nvPr/>
+        </p:nvSpPr>
+        <p:spPr>
+          <a:xfrm>
+            <a:off x="8948318" y="1051560"/>
+            <a:ext cx="54864" cy="3200400"/>
+          </a:xfrm>
+          <a:prstGeom prst="rect">
+            <a:avLst/>
+          </a:prstGeom>
+          <a:solidFill>
+            <a:srgbClr val="EFC78D"/>
+          </a:solidFill>
+          <a:ln>
+            <a:noFill/>
+          </a:ln>
+        </p:spPr>
+        <p:style>
+          <a:lnRef idx="1">
+            <a:schemeClr val="accent1"/>
+          </a:lnRef>
+          <a:fillRef idx="3">
+            <a:schemeClr val="accent1"/>
+          </a:fillRef>
+          <a:effectRef idx="2">
+            <a:schemeClr val="accent1"/>
+          </a:effectRef>
+          <a:fontRef idx="minor">
+            <a:schemeClr val="lt1"/>
+          </a:fontRef>
+        </p:style>
+        <p:txBody>
+          <a:bodyPr rtlCol="0" anchor="ctr"/>
+          <a:lstStyle/>
+          <a:p>
+            <a:pPr algn="ctr"/>
+          </a:p>
+        </p:txBody>
+      </p:sp>
+      <p:sp>
+        <p:nvSpPr>
+          <p:cNvPr id="23" name="Rectangle 22"/>
+          <p:cNvSpPr/>
+          <p:nvPr/>
+        </p:nvSpPr>
+        <p:spPr>
+          <a:xfrm>
+            <a:off x="9573768" y="1051560"/>
+            <a:ext cx="54864" cy="3200400"/>
+          </a:xfrm>
+          <a:prstGeom prst="rect">
+            <a:avLst/>
+          </a:prstGeom>
+          <a:solidFill>
+            <a:srgbClr val="EFC78D"/>
+          </a:solidFill>
+          <a:ln>
+            <a:noFill/>
+          </a:ln>
+        </p:spPr>
+        <p:style>
+          <a:lnRef idx="1">
+            <a:schemeClr val="accent1"/>
+          </a:lnRef>
+          <a:fillRef idx="3">
+            <a:schemeClr val="accent1"/>
+          </a:fillRef>
+          <a:effectRef idx="2">
+            <a:schemeClr val="accent1"/>
+          </a:effectRef>
+          <a:fontRef idx="minor">
+            <a:schemeClr val="lt1"/>
+          </a:fontRef>
+        </p:style>
+        <p:txBody>
+          <a:bodyPr rtlCol="0" anchor="ctr"/>
+          <a:lstStyle/>
+          <a:p>
+            <a:pPr algn="ctr"/>
+          </a:p>
+        </p:txBody>
+      </p:sp>
+      <p:sp>
+        <p:nvSpPr>
+          <p:cNvPr id="24" name="Rectangle 23"/>
+          <p:cNvSpPr/>
+          <p:nvPr/>
+        </p:nvSpPr>
+        <p:spPr>
+          <a:xfrm>
+            <a:off x="10199217" y="1051560"/>
+            <a:ext cx="54864" cy="3200400"/>
+          </a:xfrm>
+          <a:prstGeom prst="rect">
+            <a:avLst/>
+          </a:prstGeom>
+          <a:solidFill>
+            <a:srgbClr val="EFC78D"/>
+          </a:solidFill>
+          <a:ln>
+            <a:noFill/>
+          </a:ln>
+        </p:spPr>
+        <p:style>
+          <a:lnRef idx="1">
+            <a:schemeClr val="accent1"/>
+          </a:lnRef>
+          <a:fillRef idx="3">
+            <a:schemeClr val="accent1"/>
+          </a:fillRef>
+          <a:effectRef idx="2">
+            <a:schemeClr val="accent1"/>
+          </a:effectRef>
+          <a:fontRef idx="minor">
+            <a:schemeClr val="lt1"/>
+          </a:fontRef>
+        </p:style>
+        <p:txBody>
+          <a:bodyPr rtlCol="0" anchor="ctr"/>
+          <a:lstStyle/>
+          <a:p>
+            <a:pPr algn="ctr"/>
+          </a:p>
+        </p:txBody>
+      </p:sp>
+      <p:sp>
+        <p:nvSpPr>
+          <p:cNvPr id="25" name="Rounded Rectangle 24"/>
+          <p:cNvSpPr/>
+          <p:nvPr/>
+        </p:nvSpPr>
+        <p:spPr>
+          <a:xfrm>
+            <a:off x="6537960" y="3103473"/>
+            <a:ext cx="4754880" cy="625449"/>
+          </a:xfrm>
+          <a:prstGeom prst="roundRect">
+            <a:avLst/>
+          </a:prstGeom>
+          <a:solidFill>
+            <a:srgbClr val="456C5B"/>
+          </a:solidFill>
+          <a:ln w="12700">
+            <a:solidFill>
+              <a:srgbClr val="456C5B"/>
+            </a:solidFill>
+          </a:ln>
+        </p:spPr>
+        <p:style>
+          <a:lnRef idx="1">
+            <a:schemeClr val="accent1"/>
+          </a:lnRef>
+          <a:fillRef idx="3">
+            <a:schemeClr val="accent1"/>
+          </a:fillRef>
+          <a:effectRef idx="2">
+            <a:schemeClr val="accent1"/>
+          </a:effectRef>
+          <a:fontRef idx="minor">
+            <a:schemeClr val="lt1"/>
+          </a:fontRef>
+        </p:style>
+        <p:txBody>
+          <a:bodyPr rtlCol="0" anchor="ctr"/>
+          <a:lstStyle/>
+          <a:p>
+            <a:pPr algn="ctr"/>
+          </a:p>
+        </p:txBody>
+      </p:sp>
+      <p:sp>
+        <p:nvSpPr>
+          <p:cNvPr id="26" name="Rounded Rectangle 25"/>
+          <p:cNvSpPr/>
+          <p:nvPr/>
+        </p:nvSpPr>
+        <p:spPr>
+          <a:xfrm>
+            <a:off x="7247534" y="2478024"/>
+            <a:ext cx="3335731" cy="382219"/>
+          </a:xfrm>
+          <a:prstGeom prst="roundRect">
+            <a:avLst/>
+          </a:prstGeom>
+          <a:solidFill>
+            <a:srgbClr val="BCA6E6"/>
+          </a:solidFill>
+          <a:ln w="12700">
+            <a:solidFill>
+              <a:srgbClr val="BCA6E6"/>
+            </a:solidFill>
+          </a:ln>
+        </p:spPr>
+        <p:style>
+          <a:lnRef idx="1">
+            <a:schemeClr val="accent1"/>
+          </a:lnRef>
+          <a:fillRef idx="3">
+            <a:schemeClr val="accent1"/>
+          </a:fillRef>
+          <a:effectRef idx="2">
+            <a:schemeClr val="accent1"/>
+          </a:effectRef>
+          <a:fontRef idx="minor">
+            <a:schemeClr val="lt1"/>
+          </a:fontRef>
+        </p:style>
+        <p:txBody>
+          <a:bodyPr rtlCol="0" anchor="ctr"/>
+          <a:lstStyle/>
+          <a:p>
+            <a:pPr algn="ctr"/>
+          </a:p>
+        </p:txBody>
+      </p:sp>
+      <p:sp>
+        <p:nvSpPr>
+          <p:cNvPr id="27" name="TextBox 26"/>
+          <p:cNvSpPr txBox="1"/>
+          <p:nvPr/>
+        </p:nvSpPr>
+        <p:spPr>
+          <a:xfrm>
+            <a:off x="6492240" y="3763670"/>
+            <a:ext cx="4846320" cy="228600"/>
+          </a:xfrm>
+          <a:prstGeom prst="rect">
+            <a:avLst/>
+          </a:prstGeom>
+          <a:noFill/>
+        </p:spPr>
+        <p:txBody>
+          <a:bodyPr wrap="square" lIns="63500" rIns="63500" tIns="50800">
+            <a:spAutoFit/>
+          </a:bodyPr>
+          <a:lstStyle/>
+          <a:p>
+            <a:pPr algn="ctr">
+              <a:defRPr sz="1200" b="1">
+                <a:solidFill>
+                  <a:srgbClr val="FFFFFF"/>
+                </a:solidFill>
+                <a:latin typeface="Noto Sans CJK SC"/>
+              </a:defRPr>
+            </a:pPr>
+            <a:r>
+              <a:t>公开实景照片索引：工业伞盖与公共绿化</a:t>
+            </a:r>
+          </a:p>
+        </p:txBody>
+      </p:sp>
+      <p:sp>
+        <p:nvSpPr>
+          <p:cNvPr id="28" name="TextBox 27"/>
+          <p:cNvSpPr txBox="1"/>
+          <p:nvPr/>
+        </p:nvSpPr>
+        <p:spPr>
+          <a:xfrm>
+            <a:off x="822960" y="4617720"/>
+            <a:ext cx="4937760" cy="320040"/>
+          </a:xfrm>
+          <a:prstGeom prst="rect">
+            <a:avLst/>
+          </a:prstGeom>
+          <a:noFill/>
+        </p:spPr>
+        <p:txBody>
+          <a:bodyPr wrap="square" lIns="63500" rIns="63500" tIns="50800">
+            <a:spAutoFit/>
+          </a:bodyPr>
+          <a:lstStyle/>
+          <a:p>
+            <a:pPr algn="l">
+              <a:defRPr sz="1600" b="1">
+                <a:solidFill>
+                  <a:srgbClr val="193C35"/>
+                </a:solidFill>
+                <a:latin typeface="Noto Sans CJK SC"/>
+              </a:defRPr>
+            </a:pPr>
+            <a:r>
+              <a:t>照片 A：主装配厂房外部 / Sawtooth canopy</a:t>
+            </a:r>
+          </a:p>
+        </p:txBody>
+      </p:sp>
+      <p:sp>
+        <p:nvSpPr>
+          <p:cNvPr id="29" name="TextBox 28"/>
+          <p:cNvSpPr txBox="1"/>
+          <p:nvPr/>
+        </p:nvSpPr>
+        <p:spPr>
+          <a:xfrm>
+            <a:off x="6446520" y="4617720"/>
+            <a:ext cx="4937760" cy="320040"/>
+          </a:xfrm>
+          <a:prstGeom prst="rect">
+            <a:avLst/>
+          </a:prstGeom>
+          <a:noFill/>
+        </p:spPr>
+        <p:txBody>
+          <a:bodyPr wrap="square" lIns="63500" rIns="63500" tIns="50800">
+            <a:spAutoFit/>
+          </a:bodyPr>
+          <a:lstStyle/>
+          <a:p>
+            <a:pPr algn="l">
+              <a:defRPr sz="1600" b="1">
+                <a:solidFill>
+                  <a:srgbClr val="193C35"/>
+                </a:solidFill>
+                <a:latin typeface="Noto Sans CJK SC"/>
+              </a:defRPr>
+            </a:pPr>
+            <a:r>
+              <a:t>照片 B：室内森林 / Foyer Forest</a:t>
+            </a:r>
+          </a:p>
+        </p:txBody>
+      </p:sp>
+      <p:sp>
+        <p:nvSpPr>
+          <p:cNvPr id="30" name="TextBox 29"/>
+          <p:cNvSpPr txBox="1"/>
+          <p:nvPr/>
+        </p:nvSpPr>
+        <p:spPr>
+          <a:xfrm>
+            <a:off x="822960" y="5029200"/>
+            <a:ext cx="4892040" cy="731520"/>
+          </a:xfrm>
+          <a:prstGeom prst="rect">
+            <a:avLst/>
+          </a:prstGeom>
+          <a:noFill/>
+        </p:spPr>
+        <p:txBody>
+          <a:bodyPr wrap="square" lIns="63500" rIns="63500" tIns="50800">
+            <a:spAutoFit/>
+          </a:bodyPr>
+          <a:lstStyle/>
+          <a:p>
+            <a:pPr algn="l">
+              <a:defRPr sz="1100" b="0">
+                <a:solidFill>
+                  <a:srgbClr val="65746D"/>
+                </a:solidFill>
+                <a:latin typeface="Noto Sans CJK SC"/>
+              </a:defRPr>
+            </a:pPr>
+            <a:r>
+              <a:t>来源：ArchitectureAu</a:t>
+            </a:r>
+            <a:br/>
+            <a:r>
+              <a:t>https://architectureau.com/articles/tonsley-main-assembly-building-redevelopment/</a:t>
+            </a:r>
+          </a:p>
+        </p:txBody>
+      </p:sp>
+      <p:sp>
+        <p:nvSpPr>
+          <p:cNvPr id="31" name="TextBox 30"/>
+          <p:cNvSpPr txBox="1"/>
+          <p:nvPr/>
+        </p:nvSpPr>
+        <p:spPr>
+          <a:xfrm>
+            <a:off x="6446520" y="5029200"/>
+            <a:ext cx="4892040" cy="731520"/>
+          </a:xfrm>
+          <a:prstGeom prst="rect">
+            <a:avLst/>
+          </a:prstGeom>
+          <a:noFill/>
+        </p:spPr>
+        <p:txBody>
+          <a:bodyPr wrap="square" lIns="63500" rIns="63500" tIns="50800">
+            <a:spAutoFit/>
+          </a:bodyPr>
+          <a:lstStyle/>
+          <a:p>
+            <a:pPr algn="l">
+              <a:defRPr sz="1100" b="0">
+                <a:solidFill>
+                  <a:srgbClr val="65746D"/>
+                </a:solidFill>
+                <a:latin typeface="Noto Sans CJK SC"/>
+              </a:defRPr>
+            </a:pPr>
+            <a:r>
+              <a:t>来源：Tonsley</a:t>
+            </a:r>
+            <a:br/>
+            <a:r>
+              <a:t>https://tonsley.com.au/news/tonsley-drives-towards-a-greener-future-with-new-mab-forest/</a:t>
+            </a:r>
+          </a:p>
+        </p:txBody>
+      </p:sp>
+      <p:sp>
+        <p:nvSpPr>
+          <p:cNvPr id="32" name="Rounded Rectangle 31"/>
+          <p:cNvSpPr/>
+          <p:nvPr/>
+        </p:nvSpPr>
+        <p:spPr>
+          <a:xfrm>
+            <a:off x="822960" y="5806440"/>
+            <a:ext cx="10424160" cy="384048"/>
+          </a:xfrm>
+          <a:prstGeom prst="roundRect">
+            <a:avLst/>
+          </a:prstGeom>
+          <a:solidFill>
+            <a:srgbClr val="EFC78D"/>
+          </a:solidFill>
+          <a:ln w="12700">
+            <a:solidFill>
+              <a:srgbClr val="D06B42"/>
+            </a:solidFill>
+          </a:ln>
+        </p:spPr>
+        <p:style>
+          <a:lnRef idx="1">
+            <a:schemeClr val="accent1"/>
+          </a:lnRef>
+          <a:fillRef idx="3">
+            <a:schemeClr val="accent1"/>
+          </a:fillRef>
+          <a:effectRef idx="2">
+            <a:schemeClr val="accent1"/>
+          </a:effectRef>
+          <a:fontRef idx="minor">
+            <a:schemeClr val="lt1"/>
+          </a:fontRef>
+        </p:style>
+        <p:txBody>
+          <a:bodyPr rtlCol="0" anchor="ctr"/>
+          <a:lstStyle/>
+          <a:p>
+            <a:pPr algn="ctr"/>
+          </a:p>
+        </p:txBody>
+      </p:sp>
+      <p:sp>
+        <p:nvSpPr>
+          <p:cNvPr id="33" name="TextBox 32"/>
+          <p:cNvSpPr txBox="1"/>
+          <p:nvPr/>
+        </p:nvSpPr>
+        <p:spPr>
+          <a:xfrm>
+            <a:off x="960120" y="5897880"/>
+            <a:ext cx="10149840" cy="164592"/>
+          </a:xfrm>
+          <a:prstGeom prst="rect">
+            <a:avLst/>
+          </a:prstGeom>
+          <a:noFill/>
+        </p:spPr>
+        <p:txBody>
+          <a:bodyPr wrap="square" lIns="63500" rIns="63500" tIns="50800">
+            <a:spAutoFit/>
+          </a:bodyPr>
+          <a:lstStyle/>
+          <a:p>
+            <a:pPr algn="ctr">
+              <a:defRPr sz="1500" b="1">
+                <a:solidFill>
+                  <a:srgbClr val="193C35"/>
+                </a:solidFill>
+                <a:latin typeface="Noto Sans CJK SC"/>
+              </a:defRPr>
+            </a:pPr>
+            <a:r>
+              <a:t>照片阅读：保留屋盖的连续性 + 室内绿化的停留性，共同把“工厂”转化为“公共客厅”。</a:t>
+            </a:r>
+          </a:p>
+        </p:txBody>
+      </p:sp>
+      <p:sp>
+        <p:nvSpPr>
+          <p:cNvPr id="34" name="TextBox 33"/>
+          <p:cNvSpPr txBox="1"/>
+          <p:nvPr/>
+        </p:nvSpPr>
+        <p:spPr>
+          <a:xfrm>
+            <a:off x="411480" y="6547104"/>
+            <a:ext cx="10972800" cy="164592"/>
+          </a:xfrm>
+          <a:prstGeom prst="rect">
+            <a:avLst/>
+          </a:prstGeom>
+          <a:noFill/>
+        </p:spPr>
+        <p:txBody>
+          <a:bodyPr wrap="square" lIns="63500" rIns="63500" tIns="50800">
+            <a:spAutoFit/>
+          </a:bodyPr>
+          <a:lstStyle/>
+          <a:p>
+            <a:pPr algn="l">
+              <a:defRPr sz="900" b="0">
+                <a:solidFill>
+                  <a:srgbClr val="65746D"/>
+                </a:solidFill>
+                <a:latin typeface="Noto Sans CJK SC"/>
+              </a:defRPr>
+            </a:pPr>
+            <a:r>
+              <a:t>照片索引页：图片来自项目公开页面，点击链接查看原图；分析图为本次重新绘制。</a:t>
+            </a:r>
+          </a:p>
+        </p:txBody>
+      </p:sp>
+    </p:spTree>
+  </p:cSld>
+  <p:clrMapOvr>
+    <a:masterClrMapping/>
+  </p:clrMapOvr>
+</p:sld>
+</file>
+
+<file path=ppt/slides/slide11.xml><?xml version="1.0" encoding="utf-8"?>
+<p:sld xmlns:a="http://schemas.openxmlformats.org/drawingml/2006/main" xmlns:p="http://schemas.openxmlformats.org/presentationml/2006/main" xmlns:r="http://schemas.openxmlformats.org/officeDocument/2006/relationships">
+  <p:cSld>
+    <p:bg>
+      <p:bgPr>
+        <a:solidFill>
+          <a:srgbClr val="F7F5EF"/>
+        </a:solidFill>
+        <a:effectLst/>
+      </p:bgPr>
+    </p:bg>
+    <p:spTree>
+      <p:nvGrpSpPr>
+        <p:cNvPr id="1" name=""/>
+        <p:cNvGrpSpPr/>
+        <p:nvPr/>
+      </p:nvGrpSpPr>
+      <p:grpSpPr/>
+      <p:sp>
+        <p:nvSpPr>
+          <p:cNvPr id="2" name="Rounded Rectangle 1"/>
+          <p:cNvSpPr/>
+          <p:nvPr/>
+        </p:nvSpPr>
+        <p:spPr>
+          <a:xfrm>
+            <a:off x="0" y="0"/>
+            <a:ext cx="12191695" cy="502920"/>
+          </a:xfrm>
+          <a:prstGeom prst="roundRect">
+            <a:avLst/>
+          </a:prstGeom>
+          <a:solidFill>
+            <a:srgbClr val="193C35"/>
+          </a:solidFill>
+          <a:ln w="12700">
+            <a:solidFill>
+              <a:srgbClr val="193C35"/>
+            </a:solidFill>
+          </a:ln>
+        </p:spPr>
+        <p:style>
+          <a:lnRef idx="1">
+            <a:schemeClr val="accent1"/>
+          </a:lnRef>
+          <a:fillRef idx="3">
+            <a:schemeClr val="accent1"/>
+          </a:fillRef>
+          <a:effectRef idx="2">
+            <a:schemeClr val="accent1"/>
+          </a:effectRef>
+          <a:fontRef idx="minor">
+            <a:schemeClr val="lt1"/>
+          </a:fontRef>
+        </p:style>
+        <p:txBody>
+          <a:bodyPr rtlCol="0" anchor="ctr"/>
+          <a:lstStyle/>
+          <a:p>
+            <a:pPr algn="ctr"/>
+          </a:p>
+        </p:txBody>
+      </p:sp>
+      <p:sp>
+        <p:nvSpPr>
+          <p:cNvPr id="3" name="TextBox 2"/>
+          <p:cNvSpPr txBox="1"/>
+          <p:nvPr/>
+        </p:nvSpPr>
+        <p:spPr>
+          <a:xfrm>
+            <a:off x="411480" y="100584"/>
+            <a:ext cx="457200" cy="228600"/>
+          </a:xfrm>
+          <a:prstGeom prst="rect">
+            <a:avLst/>
+          </a:prstGeom>
+          <a:noFill/>
+        </p:spPr>
+        <p:txBody>
+          <a:bodyPr wrap="square" lIns="63500" rIns="63500" tIns="50800">
+            <a:spAutoFit/>
+          </a:bodyPr>
+          <a:lstStyle/>
+          <a:p>
+            <a:pPr algn="l">
+              <a:defRPr sz="1600" b="1">
+                <a:solidFill>
+                  <a:srgbClr val="D9EADF"/>
+                </a:solidFill>
+                <a:latin typeface="Noto Sans CJK SC"/>
+              </a:defRPr>
+            </a:pPr>
+            <a:r>
+              <a:t>08</a:t>
+            </a:r>
+          </a:p>
+        </p:txBody>
+      </p:sp>
+      <p:sp>
+        <p:nvSpPr>
+          <p:cNvPr id="4" name="TextBox 3"/>
+          <p:cNvSpPr txBox="1"/>
+          <p:nvPr/>
+        </p:nvSpPr>
+        <p:spPr>
+          <a:xfrm>
+            <a:off x="960120" y="73152"/>
+            <a:ext cx="8229600" cy="274320"/>
+          </a:xfrm>
+          <a:prstGeom prst="rect">
+            <a:avLst/>
+          </a:prstGeom>
+          <a:noFill/>
+        </p:spPr>
+        <p:txBody>
+          <a:bodyPr wrap="square" lIns="63500" rIns="63500" tIns="50800">
+            <a:spAutoFit/>
+          </a:bodyPr>
+          <a:lstStyle/>
+          <a:p>
+            <a:pPr algn="l">
+              <a:defRPr sz="2400" b="1">
+                <a:solidFill>
+                  <a:srgbClr val="193C35"/>
+                </a:solidFill>
+                <a:latin typeface="Noto Sans CJK SC"/>
+              </a:defRPr>
+            </a:pPr>
+            <a:r>
+              <a:t>案例二独立分析：实地照片与空间阅读</a:t>
+            </a:r>
+          </a:p>
+        </p:txBody>
+      </p:sp>
+      <p:sp>
+        <p:nvSpPr>
+          <p:cNvPr id="5" name="TextBox 4"/>
+          <p:cNvSpPr txBox="1"/>
+          <p:nvPr/>
+        </p:nvSpPr>
+        <p:spPr>
+          <a:xfrm>
+            <a:off x="8869680" y="118872"/>
+            <a:ext cx="2743200" cy="182880"/>
+          </a:xfrm>
+          <a:prstGeom prst="rect">
+            <a:avLst/>
+          </a:prstGeom>
+          <a:noFill/>
+        </p:spPr>
+        <p:txBody>
+          <a:bodyPr wrap="square" lIns="63500" rIns="63500" tIns="50800">
+            <a:spAutoFit/>
+          </a:bodyPr>
+          <a:lstStyle/>
+          <a:p>
+            <a:pPr algn="r">
+              <a:defRPr sz="1000" b="0">
+                <a:solidFill>
+                  <a:srgbClr val="65746D"/>
+                </a:solidFill>
+                <a:latin typeface="Noto Sans CJK SC"/>
+              </a:defRPr>
+            </a:pPr>
+            <a:r>
+              <a:t>YOUJIAWA · PHOTO INDEX</a:t>
+            </a:r>
+          </a:p>
+        </p:txBody>
+      </p:sp>
+      <p:sp>
+        <p:nvSpPr>
+          <p:cNvPr id="6" name="Rounded Rectangle 5"/>
+          <p:cNvSpPr/>
+          <p:nvPr/>
+        </p:nvSpPr>
+        <p:spPr>
+          <a:xfrm>
+            <a:off x="685800" y="914400"/>
+            <a:ext cx="5212080" cy="3474720"/>
+          </a:xfrm>
+          <a:prstGeom prst="roundRect">
+            <a:avLst/>
+          </a:prstGeom>
+          <a:solidFill>
+            <a:srgbClr val="193C35"/>
+          </a:solidFill>
+          <a:ln w="12700">
+            <a:solidFill>
+              <a:srgbClr val="193C35"/>
+            </a:solidFill>
+          </a:ln>
+        </p:spPr>
+        <p:style>
+          <a:lnRef idx="1">
+            <a:schemeClr val="accent1"/>
+          </a:lnRef>
+          <a:fillRef idx="3">
+            <a:schemeClr val="accent1"/>
+          </a:fillRef>
+          <a:effectRef idx="2">
+            <a:schemeClr val="accent1"/>
+          </a:effectRef>
+          <a:fontRef idx="minor">
+            <a:schemeClr val="lt1"/>
+          </a:fontRef>
+        </p:style>
+        <p:txBody>
+          <a:bodyPr rtlCol="0" anchor="ctr"/>
+          <a:lstStyle/>
+          <a:p>
+            <a:pPr algn="ctr"/>
+          </a:p>
+        </p:txBody>
+      </p:sp>
+      <p:sp>
+        <p:nvSpPr>
+          <p:cNvPr id="7" name="Rounded Rectangle 6"/>
+          <p:cNvSpPr/>
+          <p:nvPr/>
+        </p:nvSpPr>
+        <p:spPr>
+          <a:xfrm>
+            <a:off x="850392" y="1097280"/>
+            <a:ext cx="4882896" cy="1042415"/>
+          </a:xfrm>
+          <a:prstGeom prst="roundRect">
+            <a:avLst/>
+          </a:prstGeom>
+          <a:solidFill>
+            <a:srgbClr val="EFC78D"/>
+          </a:solidFill>
+          <a:ln w="12700">
+            <a:solidFill>
+              <a:srgbClr val="EFC78D"/>
+            </a:solidFill>
+          </a:ln>
+        </p:spPr>
+        <p:style>
+          <a:lnRef idx="1">
+            <a:schemeClr val="accent1"/>
+          </a:lnRef>
+          <a:fillRef idx="3">
+            <a:schemeClr val="accent1"/>
+          </a:fillRef>
+          <a:effectRef idx="2">
+            <a:schemeClr val="accent1"/>
+          </a:effectRef>
+          <a:fontRef idx="minor">
+            <a:schemeClr val="lt1"/>
+          </a:fontRef>
+        </p:style>
+        <p:txBody>
+          <a:bodyPr rtlCol="0" anchor="ctr"/>
+          <a:lstStyle/>
+          <a:p>
+            <a:pPr algn="ctr"/>
+          </a:p>
+        </p:txBody>
+      </p:sp>
+      <p:sp>
+        <p:nvSpPr>
+          <p:cNvPr id="8" name="Rounded Rectangle 7"/>
+          <p:cNvSpPr/>
+          <p:nvPr/>
+        </p:nvSpPr>
+        <p:spPr>
+          <a:xfrm>
+            <a:off x="960120" y="2929737"/>
+            <a:ext cx="4663440" cy="521207"/>
+          </a:xfrm>
+          <a:prstGeom prst="roundRect">
+            <a:avLst/>
+          </a:prstGeom>
+          <a:solidFill>
+            <a:srgbClr val="BCA6E6"/>
+          </a:solidFill>
+          <a:ln w="12700">
+            <a:solidFill>
+              <a:srgbClr val="BCA6E6"/>
+            </a:solidFill>
+          </a:ln>
+        </p:spPr>
+        <p:style>
+          <a:lnRef idx="1">
+            <a:schemeClr val="accent1"/>
+          </a:lnRef>
+          <a:fillRef idx="3">
+            <a:schemeClr val="accent1"/>
+          </a:fillRef>
+          <a:effectRef idx="2">
+            <a:schemeClr val="accent1"/>
+          </a:effectRef>
+          <a:fontRef idx="minor">
+            <a:schemeClr val="lt1"/>
+          </a:fontRef>
+        </p:style>
+        <p:txBody>
+          <a:bodyPr rtlCol="0" anchor="ctr"/>
+          <a:lstStyle/>
+          <a:p>
+            <a:pPr algn="ctr"/>
+          </a:p>
+        </p:txBody>
+      </p:sp>
+      <p:sp>
+        <p:nvSpPr>
+          <p:cNvPr id="9" name="Rounded Rectangle 8"/>
+          <p:cNvSpPr/>
+          <p:nvPr/>
+        </p:nvSpPr>
+        <p:spPr>
+          <a:xfrm>
+            <a:off x="978408" y="3277209"/>
+            <a:ext cx="45720" cy="625449"/>
+          </a:xfrm>
+          <a:prstGeom prst="roundRect">
+            <a:avLst/>
+          </a:prstGeom>
+          <a:solidFill>
+            <a:srgbClr val="D06B42"/>
+          </a:solidFill>
+          <a:ln w="12700">
+            <a:solidFill>
+              <a:srgbClr val="D06B42"/>
+            </a:solidFill>
+          </a:ln>
+        </p:spPr>
+        <p:style>
+          <a:lnRef idx="1">
+            <a:schemeClr val="accent1"/>
+          </a:lnRef>
+          <a:fillRef idx="3">
+            <a:schemeClr val="accent1"/>
+          </a:fillRef>
+          <a:effectRef idx="2">
+            <a:schemeClr val="accent1"/>
+          </a:effectRef>
+          <a:fontRef idx="minor">
+            <a:schemeClr val="lt1"/>
+          </a:fontRef>
+        </p:style>
+        <p:txBody>
+          <a:bodyPr rtlCol="0" anchor="ctr"/>
+          <a:lstStyle/>
+          <a:p>
+            <a:pPr algn="ctr"/>
+          </a:p>
+        </p:txBody>
+      </p:sp>
+      <p:sp>
+        <p:nvSpPr>
+          <p:cNvPr id="10" name="Rounded Rectangle 9"/>
+          <p:cNvSpPr/>
+          <p:nvPr/>
+        </p:nvSpPr>
+        <p:spPr>
+          <a:xfrm>
+            <a:off x="1901952" y="3277209"/>
+            <a:ext cx="45720" cy="625449"/>
+          </a:xfrm>
+          <a:prstGeom prst="roundRect">
+            <a:avLst/>
+          </a:prstGeom>
+          <a:solidFill>
+            <a:srgbClr val="D06B42"/>
+          </a:solidFill>
+          <a:ln w="12700">
+            <a:solidFill>
+              <a:srgbClr val="D06B42"/>
+            </a:solidFill>
+          </a:ln>
+        </p:spPr>
+        <p:style>
+          <a:lnRef idx="1">
+            <a:schemeClr val="accent1"/>
+          </a:lnRef>
+          <a:fillRef idx="3">
+            <a:schemeClr val="accent1"/>
+          </a:fillRef>
+          <a:effectRef idx="2">
+            <a:schemeClr val="accent1"/>
+          </a:effectRef>
+          <a:fontRef idx="minor">
+            <a:schemeClr val="lt1"/>
+          </a:fontRef>
+        </p:style>
+        <p:txBody>
+          <a:bodyPr rtlCol="0" anchor="ctr"/>
+          <a:lstStyle/>
+          <a:p>
+            <a:pPr algn="ctr"/>
+          </a:p>
+        </p:txBody>
+      </p:sp>
+      <p:sp>
+        <p:nvSpPr>
+          <p:cNvPr id="11" name="Rounded Rectangle 10"/>
+          <p:cNvSpPr/>
+          <p:nvPr/>
+        </p:nvSpPr>
+        <p:spPr>
+          <a:xfrm>
+            <a:off x="2825496" y="3277209"/>
+            <a:ext cx="45720" cy="625449"/>
+          </a:xfrm>
+          <a:prstGeom prst="roundRect">
+            <a:avLst/>
+          </a:prstGeom>
+          <a:solidFill>
+            <a:srgbClr val="D06B42"/>
+          </a:solidFill>
+          <a:ln w="12700">
+            <a:solidFill>
+              <a:srgbClr val="D06B42"/>
+            </a:solidFill>
+          </a:ln>
+        </p:spPr>
+        <p:style>
+          <a:lnRef idx="1">
+            <a:schemeClr val="accent1"/>
+          </a:lnRef>
+          <a:fillRef idx="3">
+            <a:schemeClr val="accent1"/>
+          </a:fillRef>
+          <a:effectRef idx="2">
+            <a:schemeClr val="accent1"/>
+          </a:effectRef>
+          <a:fontRef idx="minor">
+            <a:schemeClr val="lt1"/>
+          </a:fontRef>
+        </p:style>
+        <p:txBody>
+          <a:bodyPr rtlCol="0" anchor="ctr"/>
+          <a:lstStyle/>
+          <a:p>
+            <a:pPr algn="ctr"/>
+          </a:p>
+        </p:txBody>
+      </p:sp>
+      <p:sp>
+        <p:nvSpPr>
+          <p:cNvPr id="12" name="Rounded Rectangle 11"/>
+          <p:cNvSpPr/>
+          <p:nvPr/>
+        </p:nvSpPr>
+        <p:spPr>
+          <a:xfrm>
+            <a:off x="3749039" y="3277209"/>
+            <a:ext cx="45720" cy="625449"/>
+          </a:xfrm>
+          <a:prstGeom prst="roundRect">
+            <a:avLst/>
+          </a:prstGeom>
+          <a:solidFill>
+            <a:srgbClr val="D06B42"/>
+          </a:solidFill>
+          <a:ln w="12700">
+            <a:solidFill>
+              <a:srgbClr val="D06B42"/>
+            </a:solidFill>
+          </a:ln>
+        </p:spPr>
+        <p:style>
+          <a:lnRef idx="1">
+            <a:schemeClr val="accent1"/>
+          </a:lnRef>
+          <a:fillRef idx="3">
+            <a:schemeClr val="accent1"/>
+          </a:fillRef>
+          <a:effectRef idx="2">
+            <a:schemeClr val="accent1"/>
+          </a:effectRef>
+          <a:fontRef idx="minor">
+            <a:schemeClr val="lt1"/>
+          </a:fontRef>
+        </p:style>
+        <p:txBody>
+          <a:bodyPr rtlCol="0" anchor="ctr"/>
+          <a:lstStyle/>
+          <a:p>
+            <a:pPr algn="ctr"/>
+          </a:p>
+        </p:txBody>
+      </p:sp>
+      <p:sp>
+        <p:nvSpPr>
+          <p:cNvPr id="13" name="Rounded Rectangle 12"/>
+          <p:cNvSpPr/>
+          <p:nvPr/>
+        </p:nvSpPr>
+        <p:spPr>
+          <a:xfrm>
+            <a:off x="4672584" y="3277209"/>
+            <a:ext cx="45720" cy="625449"/>
+          </a:xfrm>
+          <a:prstGeom prst="roundRect">
+            <a:avLst/>
+          </a:prstGeom>
+          <a:solidFill>
+            <a:srgbClr val="D06B42"/>
+          </a:solidFill>
+          <a:ln w="12700">
+            <a:solidFill>
+              <a:srgbClr val="D06B42"/>
+            </a:solidFill>
+          </a:ln>
+        </p:spPr>
+        <p:style>
+          <a:lnRef idx="1">
+            <a:schemeClr val="accent1"/>
+          </a:lnRef>
+          <a:fillRef idx="3">
+            <a:schemeClr val="accent1"/>
+          </a:fillRef>
+          <a:effectRef idx="2">
+            <a:schemeClr val="accent1"/>
+          </a:effectRef>
+          <a:fontRef idx="minor">
+            <a:schemeClr val="lt1"/>
+          </a:fontRef>
+        </p:style>
+        <p:txBody>
+          <a:bodyPr rtlCol="0" anchor="ctr"/>
+          <a:lstStyle/>
+          <a:p>
+            <a:pPr algn="ctr"/>
+          </a:p>
+        </p:txBody>
+      </p:sp>
+      <p:sp>
+        <p:nvSpPr>
+          <p:cNvPr id="14" name="TextBox 13"/>
+          <p:cNvSpPr txBox="1"/>
+          <p:nvPr/>
+        </p:nvSpPr>
+        <p:spPr>
+          <a:xfrm>
+            <a:off x="868680" y="3763670"/>
+            <a:ext cx="4846320" cy="228600"/>
+          </a:xfrm>
+          <a:prstGeom prst="rect">
+            <a:avLst/>
+          </a:prstGeom>
+          <a:noFill/>
+        </p:spPr>
+        <p:txBody>
+          <a:bodyPr wrap="square" lIns="63500" rIns="63500" tIns="50800">
+            <a:spAutoFit/>
+          </a:bodyPr>
+          <a:lstStyle/>
+          <a:p>
+            <a:pPr algn="ctr">
+              <a:defRPr sz="1200" b="1">
+                <a:solidFill>
+                  <a:srgbClr val="FFFFFF"/>
+                </a:solidFill>
+                <a:latin typeface="Noto Sans CJK SC"/>
+              </a:defRPr>
+            </a:pPr>
+            <a:r>
+              <a:t>公开实景照片索引：红砖厂房与云影长廊</a:t>
+            </a:r>
+          </a:p>
+        </p:txBody>
+      </p:sp>
+      <p:sp>
+        <p:nvSpPr>
+          <p:cNvPr id="15" name="Rounded Rectangle 14"/>
+          <p:cNvSpPr/>
+          <p:nvPr/>
+        </p:nvSpPr>
+        <p:spPr>
+          <a:xfrm>
+            <a:off x="6309360" y="914400"/>
+            <a:ext cx="5212080" cy="3474720"/>
+          </a:xfrm>
+          <a:prstGeom prst="roundRect">
+            <a:avLst/>
+          </a:prstGeom>
+          <a:solidFill>
+            <a:srgbClr val="193C35"/>
+          </a:solidFill>
+          <a:ln w="12700">
+            <a:solidFill>
+              <a:srgbClr val="193C35"/>
+            </a:solidFill>
+          </a:ln>
+        </p:spPr>
+        <p:style>
+          <a:lnRef idx="1">
+            <a:schemeClr val="accent1"/>
+          </a:lnRef>
+          <a:fillRef idx="3">
+            <a:schemeClr val="accent1"/>
+          </a:fillRef>
+          <a:effectRef idx="2">
+            <a:schemeClr val="accent1"/>
+          </a:effectRef>
+          <a:fontRef idx="minor">
+            <a:schemeClr val="lt1"/>
+          </a:fontRef>
+        </p:style>
+        <p:txBody>
+          <a:bodyPr rtlCol="0" anchor="ctr"/>
+          <a:lstStyle/>
+          <a:p>
+            <a:pPr algn="ctr"/>
+          </a:p>
+        </p:txBody>
+      </p:sp>
+      <p:sp>
+        <p:nvSpPr>
+          <p:cNvPr id="16" name="Rounded Rectangle 15"/>
+          <p:cNvSpPr/>
+          <p:nvPr/>
+        </p:nvSpPr>
+        <p:spPr>
+          <a:xfrm>
+            <a:off x="6473952" y="1097280"/>
+            <a:ext cx="4882896" cy="1042415"/>
+          </a:xfrm>
+          <a:prstGeom prst="roundRect">
+            <a:avLst/>
+          </a:prstGeom>
+          <a:solidFill>
+            <a:srgbClr val="EFC78D"/>
+          </a:solidFill>
+          <a:ln w="12700">
+            <a:solidFill>
+              <a:srgbClr val="EFC78D"/>
+            </a:solidFill>
+          </a:ln>
+        </p:spPr>
+        <p:style>
+          <a:lnRef idx="1">
+            <a:schemeClr val="accent1"/>
+          </a:lnRef>
+          <a:fillRef idx="3">
+            <a:schemeClr val="accent1"/>
+          </a:fillRef>
+          <a:effectRef idx="2">
+            <a:schemeClr val="accent1"/>
+          </a:effectRef>
+          <a:fontRef idx="minor">
+            <a:schemeClr val="lt1"/>
+          </a:fontRef>
+        </p:style>
+        <p:txBody>
+          <a:bodyPr rtlCol="0" anchor="ctr"/>
+          <a:lstStyle/>
+          <a:p>
+            <a:pPr algn="ctr"/>
+          </a:p>
+        </p:txBody>
+      </p:sp>
+      <p:sp>
+        <p:nvSpPr>
+          <p:cNvPr id="17" name="Rounded Rectangle 16"/>
+          <p:cNvSpPr/>
+          <p:nvPr/>
+        </p:nvSpPr>
+        <p:spPr>
+          <a:xfrm>
+            <a:off x="6583680" y="2929737"/>
+            <a:ext cx="4663440" cy="521207"/>
+          </a:xfrm>
+          <a:prstGeom prst="roundRect">
+            <a:avLst/>
+          </a:prstGeom>
+          <a:solidFill>
+            <a:srgbClr val="BCA6E6"/>
+          </a:solidFill>
+          <a:ln w="12700">
+            <a:solidFill>
+              <a:srgbClr val="BCA6E6"/>
+            </a:solidFill>
+          </a:ln>
+        </p:spPr>
+        <p:style>
+          <a:lnRef idx="1">
+            <a:schemeClr val="accent1"/>
+          </a:lnRef>
+          <a:fillRef idx="3">
+            <a:schemeClr val="accent1"/>
+          </a:fillRef>
+          <a:effectRef idx="2">
+            <a:schemeClr val="accent1"/>
+          </a:effectRef>
+          <a:fontRef idx="minor">
+            <a:schemeClr val="lt1"/>
+          </a:fontRef>
+        </p:style>
+        <p:txBody>
+          <a:bodyPr rtlCol="0" anchor="ctr"/>
+          <a:lstStyle/>
+          <a:p>
+            <a:pPr algn="ctr"/>
+          </a:p>
+        </p:txBody>
+      </p:sp>
+      <p:sp>
+        <p:nvSpPr>
+          <p:cNvPr id="18" name="Rounded Rectangle 17"/>
+          <p:cNvSpPr/>
+          <p:nvPr/>
+        </p:nvSpPr>
+        <p:spPr>
+          <a:xfrm>
+            <a:off x="6601968" y="3277209"/>
+            <a:ext cx="45720" cy="625449"/>
+          </a:xfrm>
+          <a:prstGeom prst="roundRect">
+            <a:avLst/>
+          </a:prstGeom>
+          <a:solidFill>
+            <a:srgbClr val="D06B42"/>
+          </a:solidFill>
+          <a:ln w="12700">
+            <a:solidFill>
+              <a:srgbClr val="D06B42"/>
+            </a:solidFill>
+          </a:ln>
+        </p:spPr>
+        <p:style>
+          <a:lnRef idx="1">
+            <a:schemeClr val="accent1"/>
+          </a:lnRef>
+          <a:fillRef idx="3">
+            <a:schemeClr val="accent1"/>
+          </a:fillRef>
+          <a:effectRef idx="2">
+            <a:schemeClr val="accent1"/>
+          </a:effectRef>
+          <a:fontRef idx="minor">
+            <a:schemeClr val="lt1"/>
+          </a:fontRef>
+        </p:style>
+        <p:txBody>
+          <a:bodyPr rtlCol="0" anchor="ctr"/>
+          <a:lstStyle/>
+          <a:p>
+            <a:pPr algn="ctr"/>
+          </a:p>
+        </p:txBody>
+      </p:sp>
+      <p:sp>
+        <p:nvSpPr>
+          <p:cNvPr id="19" name="Rounded Rectangle 18"/>
+          <p:cNvSpPr/>
+          <p:nvPr/>
+        </p:nvSpPr>
+        <p:spPr>
+          <a:xfrm>
+            <a:off x="7525512" y="3277209"/>
+            <a:ext cx="45720" cy="625449"/>
+          </a:xfrm>
+          <a:prstGeom prst="roundRect">
+            <a:avLst/>
+          </a:prstGeom>
+          <a:solidFill>
+            <a:srgbClr val="D06B42"/>
+          </a:solidFill>
+          <a:ln w="12700">
+            <a:solidFill>
+              <a:srgbClr val="D06B42"/>
+            </a:solidFill>
+          </a:ln>
+        </p:spPr>
+        <p:style>
+          <a:lnRef idx="1">
+            <a:schemeClr val="accent1"/>
+          </a:lnRef>
+          <a:fillRef idx="3">
+            <a:schemeClr val="accent1"/>
+          </a:fillRef>
+          <a:effectRef idx="2">
+            <a:schemeClr val="accent1"/>
+          </a:effectRef>
+          <a:fontRef idx="minor">
+            <a:schemeClr val="lt1"/>
+          </a:fontRef>
+        </p:style>
+        <p:txBody>
+          <a:bodyPr rtlCol="0" anchor="ctr"/>
+          <a:lstStyle/>
+          <a:p>
+            <a:pPr algn="ctr"/>
+          </a:p>
+        </p:txBody>
+      </p:sp>
+      <p:sp>
+        <p:nvSpPr>
+          <p:cNvPr id="20" name="Rounded Rectangle 19"/>
+          <p:cNvSpPr/>
+          <p:nvPr/>
+        </p:nvSpPr>
+        <p:spPr>
+          <a:xfrm>
+            <a:off x="8449056" y="3277209"/>
+            <a:ext cx="45720" cy="625449"/>
+          </a:xfrm>
+          <a:prstGeom prst="roundRect">
+            <a:avLst/>
+          </a:prstGeom>
+          <a:solidFill>
+            <a:srgbClr val="D06B42"/>
+          </a:solidFill>
+          <a:ln w="12700">
+            <a:solidFill>
+              <a:srgbClr val="D06B42"/>
+            </a:solidFill>
+          </a:ln>
+        </p:spPr>
+        <p:style>
+          <a:lnRef idx="1">
+            <a:schemeClr val="accent1"/>
+          </a:lnRef>
+          <a:fillRef idx="3">
+            <a:schemeClr val="accent1"/>
+          </a:fillRef>
+          <a:effectRef idx="2">
+            <a:schemeClr val="accent1"/>
+          </a:effectRef>
+          <a:fontRef idx="minor">
+            <a:schemeClr val="lt1"/>
+          </a:fontRef>
+        </p:style>
+        <p:txBody>
+          <a:bodyPr rtlCol="0" anchor="ctr"/>
+          <a:lstStyle/>
+          <a:p>
+            <a:pPr algn="ctr"/>
+          </a:p>
+        </p:txBody>
+      </p:sp>
+      <p:sp>
+        <p:nvSpPr>
+          <p:cNvPr id="21" name="Rounded Rectangle 20"/>
+          <p:cNvSpPr/>
+          <p:nvPr/>
+        </p:nvSpPr>
+        <p:spPr>
+          <a:xfrm>
+            <a:off x="9372600" y="3277209"/>
+            <a:ext cx="45720" cy="625449"/>
+          </a:xfrm>
+          <a:prstGeom prst="roundRect">
+            <a:avLst/>
+          </a:prstGeom>
+          <a:solidFill>
+            <a:srgbClr val="D06B42"/>
+          </a:solidFill>
+          <a:ln w="12700">
+            <a:solidFill>
+              <a:srgbClr val="D06B42"/>
+            </a:solidFill>
+          </a:ln>
+        </p:spPr>
+        <p:style>
+          <a:lnRef idx="1">
+            <a:schemeClr val="accent1"/>
+          </a:lnRef>
+          <a:fillRef idx="3">
+            <a:schemeClr val="accent1"/>
+          </a:fillRef>
+          <a:effectRef idx="2">
+            <a:schemeClr val="accent1"/>
+          </a:effectRef>
+          <a:fontRef idx="minor">
+            <a:schemeClr val="lt1"/>
+          </a:fontRef>
+        </p:style>
+        <p:txBody>
+          <a:bodyPr rtlCol="0" anchor="ctr"/>
+          <a:lstStyle/>
+          <a:p>
+            <a:pPr algn="ctr"/>
+          </a:p>
+        </p:txBody>
+      </p:sp>
+      <p:sp>
+        <p:nvSpPr>
+          <p:cNvPr id="22" name="Rounded Rectangle 21"/>
+          <p:cNvSpPr/>
+          <p:nvPr/>
+        </p:nvSpPr>
+        <p:spPr>
+          <a:xfrm>
+            <a:off x="10296144" y="3277209"/>
+            <a:ext cx="45720" cy="625449"/>
+          </a:xfrm>
+          <a:prstGeom prst="roundRect">
+            <a:avLst/>
+          </a:prstGeom>
+          <a:solidFill>
+            <a:srgbClr val="D06B42"/>
+          </a:solidFill>
+          <a:ln w="12700">
+            <a:solidFill>
+              <a:srgbClr val="D06B42"/>
+            </a:solidFill>
+          </a:ln>
+        </p:spPr>
+        <p:style>
+          <a:lnRef idx="1">
+            <a:schemeClr val="accent1"/>
+          </a:lnRef>
+          <a:fillRef idx="3">
+            <a:schemeClr val="accent1"/>
+          </a:fillRef>
+          <a:effectRef idx="2">
+            <a:schemeClr val="accent1"/>
+          </a:effectRef>
+          <a:fontRef idx="minor">
+            <a:schemeClr val="lt1"/>
+          </a:fontRef>
+        </p:style>
+        <p:txBody>
+          <a:bodyPr rtlCol="0" anchor="ctr"/>
+          <a:lstStyle/>
+          <a:p>
+            <a:pPr algn="ctr"/>
+          </a:p>
+        </p:txBody>
+      </p:sp>
+      <p:sp>
+        <p:nvSpPr>
+          <p:cNvPr id="23" name="TextBox 22"/>
+          <p:cNvSpPr txBox="1"/>
+          <p:nvPr/>
+        </p:nvSpPr>
+        <p:spPr>
+          <a:xfrm>
+            <a:off x="6492240" y="3763670"/>
+            <a:ext cx="4846320" cy="228600"/>
+          </a:xfrm>
+          <a:prstGeom prst="rect">
+            <a:avLst/>
+          </a:prstGeom>
+          <a:noFill/>
+        </p:spPr>
+        <p:txBody>
+          <a:bodyPr wrap="square" lIns="63500" rIns="63500" tIns="50800">
+            <a:spAutoFit/>
+          </a:bodyPr>
+          <a:lstStyle/>
+          <a:p>
+            <a:pPr algn="ctr">
+              <a:defRPr sz="1200" b="1">
+                <a:solidFill>
+                  <a:srgbClr val="FFFFFF"/>
+                </a:solidFill>
+                <a:latin typeface="Noto Sans CJK SC"/>
+              </a:defRPr>
+            </a:pPr>
+            <a:r>
+              <a:t>公开实景照片索引：红砖厂房与云影长廊</a:t>
+            </a:r>
+          </a:p>
+        </p:txBody>
+      </p:sp>
+      <p:sp>
+        <p:nvSpPr>
+          <p:cNvPr id="24" name="TextBox 23"/>
+          <p:cNvSpPr txBox="1"/>
+          <p:nvPr/>
+        </p:nvSpPr>
+        <p:spPr>
+          <a:xfrm>
+            <a:off x="822960" y="4617720"/>
+            <a:ext cx="4937760" cy="320040"/>
+          </a:xfrm>
+          <a:prstGeom prst="rect">
+            <a:avLst/>
+          </a:prstGeom>
+          <a:noFill/>
+        </p:spPr>
+        <p:txBody>
+          <a:bodyPr wrap="square" lIns="63500" rIns="63500" tIns="50800">
+            <a:spAutoFit/>
+          </a:bodyPr>
+          <a:lstStyle/>
+          <a:p>
+            <a:pPr algn="l">
+              <a:defRPr sz="1600" b="1">
+                <a:solidFill>
+                  <a:srgbClr val="193C35"/>
+                </a:solidFill>
+                <a:latin typeface="Noto Sans CJK SC"/>
+              </a:defRPr>
+            </a:pPr>
+            <a:r>
+              <a:t>照片 A：红砖厂房与新白色体量</a:t>
+            </a:r>
+          </a:p>
+        </p:txBody>
+      </p:sp>
+      <p:sp>
+        <p:nvSpPr>
+          <p:cNvPr id="25" name="TextBox 24"/>
+          <p:cNvSpPr txBox="1"/>
+          <p:nvPr/>
+        </p:nvSpPr>
+        <p:spPr>
+          <a:xfrm>
+            <a:off x="6446520" y="4617720"/>
+            <a:ext cx="4937760" cy="320040"/>
+          </a:xfrm>
+          <a:prstGeom prst="rect">
+            <a:avLst/>
+          </a:prstGeom>
+          <a:noFill/>
+        </p:spPr>
+        <p:txBody>
+          <a:bodyPr wrap="square" lIns="63500" rIns="63500" tIns="50800">
+            <a:spAutoFit/>
+          </a:bodyPr>
+          <a:lstStyle/>
+          <a:p>
+            <a:pPr algn="l">
+              <a:defRPr sz="1600" b="1">
+                <a:solidFill>
+                  <a:srgbClr val="193C35"/>
+                </a:solidFill>
+                <a:latin typeface="Noto Sans CJK SC"/>
+              </a:defRPr>
+            </a:pPr>
+            <a:r>
+              <a:t>照片 B：厂房内部与高架步道</a:t>
+            </a:r>
+          </a:p>
+        </p:txBody>
+      </p:sp>
+      <p:sp>
+        <p:nvSpPr>
+          <p:cNvPr id="26" name="TextBox 25"/>
+          <p:cNvSpPr txBox="1"/>
+          <p:nvPr/>
+        </p:nvSpPr>
+        <p:spPr>
+          <a:xfrm>
+            <a:off x="822960" y="5029200"/>
+            <a:ext cx="4892040" cy="731520"/>
+          </a:xfrm>
+          <a:prstGeom prst="rect">
+            <a:avLst/>
+          </a:prstGeom>
+          <a:noFill/>
+        </p:spPr>
+        <p:txBody>
+          <a:bodyPr wrap="square" lIns="63500" rIns="63500" tIns="50800">
+            <a:spAutoFit/>
+          </a:bodyPr>
+          <a:lstStyle/>
+          <a:p>
+            <a:pPr algn="l">
+              <a:defRPr sz="1100" b="0">
+                <a:solidFill>
+                  <a:srgbClr val="65746D"/>
+                </a:solidFill>
+                <a:latin typeface="Noto Sans CJK SC"/>
+              </a:defRPr>
+            </a:pPr>
+            <a:r>
+              <a:t>来源：谷德设计</a:t>
+            </a:r>
+            <a:br/>
+            <a:r>
+              <a:t>https://www.gooood.cn/conservation-and-renovation-of-nanjing-compressor-factory-youjiawa-residential-community-center-by-seu-arch-uag.htm</a:t>
+            </a:r>
+          </a:p>
+        </p:txBody>
+      </p:sp>
+      <p:sp>
+        <p:nvSpPr>
+          <p:cNvPr id="27" name="TextBox 26"/>
+          <p:cNvSpPr txBox="1"/>
+          <p:nvPr/>
+        </p:nvSpPr>
+        <p:spPr>
+          <a:xfrm>
+            <a:off x="6446520" y="5029200"/>
+            <a:ext cx="4892040" cy="731520"/>
+          </a:xfrm>
+          <a:prstGeom prst="rect">
+            <a:avLst/>
+          </a:prstGeom>
+          <a:noFill/>
+        </p:spPr>
+        <p:txBody>
+          <a:bodyPr wrap="square" lIns="63500" rIns="63500" tIns="50800">
+            <a:spAutoFit/>
+          </a:bodyPr>
+          <a:lstStyle/>
+          <a:p>
+            <a:pPr algn="l">
+              <a:defRPr sz="1100" b="0">
+                <a:solidFill>
+                  <a:srgbClr val="65746D"/>
+                </a:solidFill>
+                <a:latin typeface="Noto Sans CJK SC"/>
+              </a:defRPr>
+            </a:pPr>
+            <a:r>
+              <a:t>来源：谷德设计（同一项目）</a:t>
+            </a:r>
+            <a:br/>
+            <a:r>
+              <a:t>https://www.gooood.cn/conservation-and-renovation-of-nanjing-compressor-factory-youjiawa-residential-community-center-by-seu-arch-uag.htm</a:t>
+            </a:r>
+          </a:p>
+        </p:txBody>
+      </p:sp>
+      <p:sp>
+        <p:nvSpPr>
+          <p:cNvPr id="28" name="Rounded Rectangle 27"/>
+          <p:cNvSpPr/>
+          <p:nvPr/>
+        </p:nvSpPr>
+        <p:spPr>
+          <a:xfrm>
+            <a:off x="822960" y="5806440"/>
+            <a:ext cx="10424160" cy="384048"/>
+          </a:xfrm>
+          <a:prstGeom prst="roundRect">
+            <a:avLst/>
+          </a:prstGeom>
+          <a:solidFill>
+            <a:srgbClr val="BCA6E6"/>
+          </a:solidFill>
+          <a:ln w="12700">
+            <a:solidFill>
+              <a:srgbClr val="BCA6E6"/>
+            </a:solidFill>
+          </a:ln>
+        </p:spPr>
+        <p:style>
+          <a:lnRef idx="1">
+            <a:schemeClr val="accent1"/>
+          </a:lnRef>
+          <a:fillRef idx="3">
+            <a:schemeClr val="accent1"/>
+          </a:fillRef>
+          <a:effectRef idx="2">
+            <a:schemeClr val="accent1"/>
+          </a:effectRef>
+          <a:fontRef idx="minor">
+            <a:schemeClr val="lt1"/>
+          </a:fontRef>
+        </p:style>
+        <p:txBody>
+          <a:bodyPr rtlCol="0" anchor="ctr"/>
+          <a:lstStyle/>
+          <a:p>
+            <a:pPr algn="ctr"/>
+          </a:p>
+        </p:txBody>
+      </p:sp>
+      <p:sp>
+        <p:nvSpPr>
+          <p:cNvPr id="29" name="TextBox 28"/>
+          <p:cNvSpPr txBox="1"/>
+          <p:nvPr/>
+        </p:nvSpPr>
+        <p:spPr>
+          <a:xfrm>
+            <a:off x="960120" y="5897880"/>
+            <a:ext cx="10149840" cy="164592"/>
+          </a:xfrm>
+          <a:prstGeom prst="rect">
+            <a:avLst/>
+          </a:prstGeom>
+          <a:noFill/>
+        </p:spPr>
+        <p:txBody>
+          <a:bodyPr wrap="square" lIns="63500" rIns="63500" tIns="50800">
+            <a:spAutoFit/>
+          </a:bodyPr>
+          <a:lstStyle/>
+          <a:p>
+            <a:pPr algn="ctr">
+              <a:defRPr sz="1500" b="1">
+                <a:solidFill>
+                  <a:srgbClr val="193C35"/>
+                </a:solidFill>
+                <a:latin typeface="Noto Sans CJK SC"/>
+              </a:defRPr>
+            </a:pPr>
+            <a:r>
+              <a:t>照片阅读：红砖、钢构、长廊和树荫形成“旧基底 + 新连接 + 社区日常”的连续场所。</a:t>
+            </a:r>
+          </a:p>
+        </p:txBody>
+      </p:sp>
+      <p:sp>
+        <p:nvSpPr>
+          <p:cNvPr id="30" name="TextBox 29"/>
+          <p:cNvSpPr txBox="1"/>
+          <p:nvPr/>
+        </p:nvSpPr>
+        <p:spPr>
+          <a:xfrm>
+            <a:off x="411480" y="6547104"/>
+            <a:ext cx="10972800" cy="164592"/>
+          </a:xfrm>
+          <a:prstGeom prst="rect">
+            <a:avLst/>
+          </a:prstGeom>
+          <a:noFill/>
+        </p:spPr>
+        <p:txBody>
+          <a:bodyPr wrap="square" lIns="63500" rIns="63500" tIns="50800">
+            <a:spAutoFit/>
+          </a:bodyPr>
+          <a:lstStyle/>
+          <a:p>
+            <a:pPr algn="l">
+              <a:defRPr sz="900" b="0">
+                <a:solidFill>
+                  <a:srgbClr val="65746D"/>
+                </a:solidFill>
+                <a:latin typeface="Noto Sans CJK SC"/>
+              </a:defRPr>
+            </a:pPr>
+            <a:r>
+              <a:t>照片索引页：图片来自项目公开页面，点击链接查看原图；分析图为本次重新绘制。</a:t>
             </a:r>
           </a:p>
         </p:txBody>
